--- a/docs/Notification-Management-Service-Overview.pptx
+++ b/docs/Notification-Management-Service-Overview.pptx
@@ -10760,7 +10760,7 @@
                 </a:solidFill>
                 <a:latin typeface="Calibri"/>
               </a:rPr>
-              <a:t>H2 (dev/test, Postgres-compatible mode) / PostgreSQL (prod profile)</a:t>
+              <a:t>SQLite (demo, file-based) / H2 (test) / PostgreSQL (prod profile)</a:t>
             </a:r>
           </a:p>
         </p:txBody>
